--- a/slides-pptx/04-Python_intro-variables_operators.pptx
+++ b/slides-pptx/04-Python_intro-variables_operators.pptx
@@ -196,29 +196,6 @@
 <file path=ppt/changesInfos/changesInfo1.xml><?xml version="1.0" encoding="utf-8"?>
 <pc:chgInfo xmlns:a="http://schemas.openxmlformats.org/drawingml/2006/main" xmlns:r="http://schemas.openxmlformats.org/officeDocument/2006/relationships" xmlns:ac="http://schemas.microsoft.com/office/drawing/2013/main/command" xmlns:pc="http://schemas.microsoft.com/office/powerpoint/2013/main/command">
   <pc:docChgLst>
-    <pc:chgData name="Frank Van Puyvelde" userId="ba4190df-4674-45fe-be59-1502c3515486" providerId="ADAL" clId="{F519E3A8-F8A1-4D37-BAD3-4D9CDEB1051A}"/>
-    <pc:docChg chg="delSld modSection">
-      <pc:chgData name="Frank Van Puyvelde" userId="ba4190df-4674-45fe-be59-1502c3515486" providerId="ADAL" clId="{F519E3A8-F8A1-4D37-BAD3-4D9CDEB1051A}" dt="2024-06-26T14:52:26.613" v="1" actId="47"/>
-      <pc:docMkLst>
-        <pc:docMk/>
-      </pc:docMkLst>
-      <pc:sldChg chg="del">
-        <pc:chgData name="Frank Van Puyvelde" userId="ba4190df-4674-45fe-be59-1502c3515486" providerId="ADAL" clId="{F519E3A8-F8A1-4D37-BAD3-4D9CDEB1051A}" dt="2024-06-26T14:52:24.985" v="0" actId="47"/>
-        <pc:sldMkLst>
-          <pc:docMk/>
-          <pc:sldMk cId="158258528" sldId="259"/>
-        </pc:sldMkLst>
-      </pc:sldChg>
-      <pc:sldChg chg="del">
-        <pc:chgData name="Frank Van Puyvelde" userId="ba4190df-4674-45fe-be59-1502c3515486" providerId="ADAL" clId="{F519E3A8-F8A1-4D37-BAD3-4D9CDEB1051A}" dt="2024-06-26T14:52:26.613" v="1" actId="47"/>
-        <pc:sldMkLst>
-          <pc:docMk/>
-          <pc:sldMk cId="2849695021" sldId="357"/>
-        </pc:sldMkLst>
-      </pc:sldChg>
-    </pc:docChg>
-  </pc:docChgLst>
-  <pc:docChgLst>
     <pc:chgData name="Frank Van Puyvelde" userId="ba4190df-4674-45fe-be59-1502c3515486" providerId="ADAL" clId="{D4E17B6D-144C-41AD-802B-50E633E8FA2E}"/>
     <pc:docChg chg="undo custSel modSld sldOrd">
       <pc:chgData name="Frank Van Puyvelde" userId="ba4190df-4674-45fe-be59-1502c3515486" providerId="ADAL" clId="{D4E17B6D-144C-41AD-802B-50E633E8FA2E}" dt="2022-11-03T15:33:48.341" v="61" actId="20577"/>
@@ -265,38 +242,6 @@
         <pc:sldMkLst>
           <pc:docMk/>
           <pc:sldMk cId="2475518922" sldId="460"/>
-        </pc:sldMkLst>
-      </pc:sldChg>
-    </pc:docChg>
-  </pc:docChgLst>
-  <pc:docChgLst>
-    <pc:chgData name="Frank Van Puyvelde" userId="ba4190df-4674-45fe-be59-1502c3515486" providerId="ADAL" clId="{FC8C9FBD-4FE6-4C94-87F3-AFF925E46192}"/>
-    <pc:docChg chg="modSld sldOrd">
-      <pc:chgData name="Frank Van Puyvelde" userId="ba4190df-4674-45fe-be59-1502c3515486" providerId="ADAL" clId="{FC8C9FBD-4FE6-4C94-87F3-AFF925E46192}" dt="2023-02-08T15:50:09.859" v="1"/>
-      <pc:docMkLst>
-        <pc:docMk/>
-      </pc:docMkLst>
-      <pc:sldChg chg="ord">
-        <pc:chgData name="Frank Van Puyvelde" userId="ba4190df-4674-45fe-be59-1502c3515486" providerId="ADAL" clId="{FC8C9FBD-4FE6-4C94-87F3-AFF925E46192}" dt="2023-02-08T15:50:09.859" v="1"/>
-        <pc:sldMkLst>
-          <pc:docMk/>
-          <pc:sldMk cId="2475518922" sldId="460"/>
-        </pc:sldMkLst>
-      </pc:sldChg>
-    </pc:docChg>
-  </pc:docChgLst>
-  <pc:docChgLst>
-    <pc:chgData name="Frank Van Puyvelde" userId="ba4190df-4674-45fe-be59-1502c3515486" providerId="ADAL" clId="{3B0CDC06-6545-49B3-9F16-F90261A31A73}"/>
-    <pc:docChg chg="modSld">
-      <pc:chgData name="Frank Van Puyvelde" userId="ba4190df-4674-45fe-be59-1502c3515486" providerId="ADAL" clId="{3B0CDC06-6545-49B3-9F16-F90261A31A73}" dt="2025-01-03T10:26:46.959" v="6" actId="114"/>
-      <pc:docMkLst>
-        <pc:docMk/>
-      </pc:docMkLst>
-      <pc:sldChg chg="modSp mod">
-        <pc:chgData name="Frank Van Puyvelde" userId="ba4190df-4674-45fe-be59-1502c3515486" providerId="ADAL" clId="{3B0CDC06-6545-49B3-9F16-F90261A31A73}" dt="2025-01-03T10:26:46.959" v="6" actId="114"/>
-        <pc:sldMkLst>
-          <pc:docMk/>
-          <pc:sldMk cId="2442840100" sldId="283"/>
         </pc:sldMkLst>
       </pc:sldChg>
     </pc:docChg>
@@ -437,6 +382,22 @@
     </pc:docChg>
   </pc:docChgLst>
   <pc:docChgLst>
+    <pc:chgData name="Frank Van Puyvelde" userId="ba4190df-4674-45fe-be59-1502c3515486" providerId="ADAL" clId="{FC8C9FBD-4FE6-4C94-87F3-AFF925E46192}"/>
+    <pc:docChg chg="modSld sldOrd">
+      <pc:chgData name="Frank Van Puyvelde" userId="ba4190df-4674-45fe-be59-1502c3515486" providerId="ADAL" clId="{FC8C9FBD-4FE6-4C94-87F3-AFF925E46192}" dt="2023-02-08T15:50:09.859" v="1"/>
+      <pc:docMkLst>
+        <pc:docMk/>
+      </pc:docMkLst>
+      <pc:sldChg chg="ord">
+        <pc:chgData name="Frank Van Puyvelde" userId="ba4190df-4674-45fe-be59-1502c3515486" providerId="ADAL" clId="{FC8C9FBD-4FE6-4C94-87F3-AFF925E46192}" dt="2023-02-08T15:50:09.859" v="1"/>
+        <pc:sldMkLst>
+          <pc:docMk/>
+          <pc:sldMk cId="2475518922" sldId="460"/>
+        </pc:sldMkLst>
+      </pc:sldChg>
+    </pc:docChg>
+  </pc:docChgLst>
+  <pc:docChgLst>
     <pc:chgData name="Ehsan Moravveji" userId="21e7e8ea3c9f37f0" providerId="LiveId" clId="{B466FD7F-38D8-469F-8982-DB9B06C3E5B0}"/>
     <pc:docChg chg="custSel modSld">
       <pc:chgData name="Ehsan Moravveji" userId="21e7e8ea3c9f37f0" providerId="LiveId" clId="{B466FD7F-38D8-469F-8982-DB9B06C3E5B0}" dt="2025-10-09T21:10:00.684" v="18" actId="1076"/>
@@ -487,6 +448,45 @@
             <ac:picMk id="4" creationId="{00000000-0000-0000-0000-000000000000}"/>
           </ac:picMkLst>
         </pc:picChg>
+      </pc:sldChg>
+    </pc:docChg>
+  </pc:docChgLst>
+  <pc:docChgLst>
+    <pc:chgData name="Frank Van Puyvelde" userId="ba4190df-4674-45fe-be59-1502c3515486" providerId="ADAL" clId="{3B0CDC06-6545-49B3-9F16-F90261A31A73}"/>
+    <pc:docChg chg="modSld">
+      <pc:chgData name="Frank Van Puyvelde" userId="ba4190df-4674-45fe-be59-1502c3515486" providerId="ADAL" clId="{3B0CDC06-6545-49B3-9F16-F90261A31A73}" dt="2025-01-03T10:26:46.959" v="6" actId="114"/>
+      <pc:docMkLst>
+        <pc:docMk/>
+      </pc:docMkLst>
+      <pc:sldChg chg="modSp mod">
+        <pc:chgData name="Frank Van Puyvelde" userId="ba4190df-4674-45fe-be59-1502c3515486" providerId="ADAL" clId="{3B0CDC06-6545-49B3-9F16-F90261A31A73}" dt="2025-01-03T10:26:46.959" v="6" actId="114"/>
+        <pc:sldMkLst>
+          <pc:docMk/>
+          <pc:sldMk cId="2442840100" sldId="283"/>
+        </pc:sldMkLst>
+      </pc:sldChg>
+    </pc:docChg>
+  </pc:docChgLst>
+  <pc:docChgLst>
+    <pc:chgData name="Frank Van Puyvelde" userId="ba4190df-4674-45fe-be59-1502c3515486" providerId="ADAL" clId="{F519E3A8-F8A1-4D37-BAD3-4D9CDEB1051A}"/>
+    <pc:docChg chg="delSld modSection">
+      <pc:chgData name="Frank Van Puyvelde" userId="ba4190df-4674-45fe-be59-1502c3515486" providerId="ADAL" clId="{F519E3A8-F8A1-4D37-BAD3-4D9CDEB1051A}" dt="2024-06-26T14:52:26.613" v="1" actId="47"/>
+      <pc:docMkLst>
+        <pc:docMk/>
+      </pc:docMkLst>
+      <pc:sldChg chg="del">
+        <pc:chgData name="Frank Van Puyvelde" userId="ba4190df-4674-45fe-be59-1502c3515486" providerId="ADAL" clId="{F519E3A8-F8A1-4D37-BAD3-4D9CDEB1051A}" dt="2024-06-26T14:52:24.985" v="0" actId="47"/>
+        <pc:sldMkLst>
+          <pc:docMk/>
+          <pc:sldMk cId="158258528" sldId="259"/>
+        </pc:sldMkLst>
+      </pc:sldChg>
+      <pc:sldChg chg="del">
+        <pc:chgData name="Frank Van Puyvelde" userId="ba4190df-4674-45fe-be59-1502c3515486" providerId="ADAL" clId="{F519E3A8-F8A1-4D37-BAD3-4D9CDEB1051A}" dt="2024-06-26T14:52:26.613" v="1" actId="47"/>
+        <pc:sldMkLst>
+          <pc:docMk/>
+          <pc:sldMk cId="2849695021" sldId="357"/>
+        </pc:sldMkLst>
       </pc:sldChg>
     </pc:docChg>
   </pc:docChgLst>
@@ -608,7 +608,7 @@
           <a:p>
             <a:fld id="{7A375BC9-5AAE-4E1F-9FAE-BC04149B1DB3}" type="datetimeFigureOut">
               <a:rPr lang="nl-BE" smtClean="0"/>
-              <a:t>9/10/2025</a:t>
+              <a:t>2/10/2026</a:t>
             </a:fld>
             <a:endParaRPr lang="nl-BE"/>
           </a:p>
@@ -1446,7 +1446,7 @@
           <a:p>
             <a:fld id="{25D4C14B-8B81-49E7-9BC7-8AE29B5E2ADB}" type="datetimeFigureOut">
               <a:rPr lang="nl-BE" smtClean="0"/>
-              <a:t>9/10/2025</a:t>
+              <a:t>2/10/2026</a:t>
             </a:fld>
             <a:endParaRPr lang="nl-BE"/>
           </a:p>
@@ -1616,7 +1616,7 @@
           <a:p>
             <a:fld id="{25D4C14B-8B81-49E7-9BC7-8AE29B5E2ADB}" type="datetimeFigureOut">
               <a:rPr lang="nl-BE" smtClean="0"/>
-              <a:t>9/10/2025</a:t>
+              <a:t>2/10/2026</a:t>
             </a:fld>
             <a:endParaRPr lang="nl-BE"/>
           </a:p>
@@ -1796,7 +1796,7 @@
           <a:p>
             <a:fld id="{25D4C14B-8B81-49E7-9BC7-8AE29B5E2ADB}" type="datetimeFigureOut">
               <a:rPr lang="nl-BE" smtClean="0"/>
-              <a:t>9/10/2025</a:t>
+              <a:t>2/10/2026</a:t>
             </a:fld>
             <a:endParaRPr lang="nl-BE"/>
           </a:p>
@@ -1966,7 +1966,7 @@
           <a:p>
             <a:fld id="{25D4C14B-8B81-49E7-9BC7-8AE29B5E2ADB}" type="datetimeFigureOut">
               <a:rPr lang="nl-BE" smtClean="0"/>
-              <a:t>9/10/2025</a:t>
+              <a:t>2/10/2026</a:t>
             </a:fld>
             <a:endParaRPr lang="nl-BE"/>
           </a:p>
@@ -2212,7 +2212,7 @@
           <a:p>
             <a:fld id="{25D4C14B-8B81-49E7-9BC7-8AE29B5E2ADB}" type="datetimeFigureOut">
               <a:rPr lang="nl-BE" smtClean="0"/>
-              <a:t>9/10/2025</a:t>
+              <a:t>2/10/2026</a:t>
             </a:fld>
             <a:endParaRPr lang="nl-BE"/>
           </a:p>
@@ -2444,7 +2444,7 @@
           <a:p>
             <a:fld id="{25D4C14B-8B81-49E7-9BC7-8AE29B5E2ADB}" type="datetimeFigureOut">
               <a:rPr lang="nl-BE" smtClean="0"/>
-              <a:t>9/10/2025</a:t>
+              <a:t>2/10/2026</a:t>
             </a:fld>
             <a:endParaRPr lang="nl-BE"/>
           </a:p>
@@ -2811,7 +2811,7 @@
           <a:p>
             <a:fld id="{25D4C14B-8B81-49E7-9BC7-8AE29B5E2ADB}" type="datetimeFigureOut">
               <a:rPr lang="nl-BE" smtClean="0"/>
-              <a:t>9/10/2025</a:t>
+              <a:t>2/10/2026</a:t>
             </a:fld>
             <a:endParaRPr lang="nl-BE"/>
           </a:p>
@@ -2929,7 +2929,7 @@
           <a:p>
             <a:fld id="{25D4C14B-8B81-49E7-9BC7-8AE29B5E2ADB}" type="datetimeFigureOut">
               <a:rPr lang="nl-BE" smtClean="0"/>
-              <a:t>9/10/2025</a:t>
+              <a:t>2/10/2026</a:t>
             </a:fld>
             <a:endParaRPr lang="nl-BE"/>
           </a:p>
@@ -3024,7 +3024,7 @@
           <a:p>
             <a:fld id="{25D4C14B-8B81-49E7-9BC7-8AE29B5E2ADB}" type="datetimeFigureOut">
               <a:rPr lang="nl-BE" smtClean="0"/>
-              <a:t>9/10/2025</a:t>
+              <a:t>2/10/2026</a:t>
             </a:fld>
             <a:endParaRPr lang="nl-BE"/>
           </a:p>
@@ -3301,7 +3301,7 @@
           <a:p>
             <a:fld id="{25D4C14B-8B81-49E7-9BC7-8AE29B5E2ADB}" type="datetimeFigureOut">
               <a:rPr lang="nl-BE" smtClean="0"/>
-              <a:t>9/10/2025</a:t>
+              <a:t>2/10/2026</a:t>
             </a:fld>
             <a:endParaRPr lang="nl-BE"/>
           </a:p>
@@ -3554,7 +3554,7 @@
           <a:p>
             <a:fld id="{25D4C14B-8B81-49E7-9BC7-8AE29B5E2ADB}" type="datetimeFigureOut">
               <a:rPr lang="nl-BE" smtClean="0"/>
-              <a:t>9/10/2025</a:t>
+              <a:t>2/10/2026</a:t>
             </a:fld>
             <a:endParaRPr lang="nl-BE"/>
           </a:p>
@@ -3767,7 +3767,7 @@
           <a:p>
             <a:fld id="{25D4C14B-8B81-49E7-9BC7-8AE29B5E2ADB}" type="datetimeFigureOut">
               <a:rPr lang="nl-BE" smtClean="0"/>
-              <a:t>9/10/2025</a:t>
+              <a:t>2/10/2026</a:t>
             </a:fld>
             <a:endParaRPr lang="nl-BE"/>
           </a:p>
@@ -9202,7 +9202,7 @@
             <a:pPr lvl="1"/>
             <a:r>
               <a:rPr lang="en-US" dirty="0"/>
-              <a:t>Created by use – no declaration necessary</a:t>
+              <a:t>Created by use – no (typed) declaration necessary</a:t>
             </a:r>
           </a:p>
           <a:p>
